--- a/output/SBOM_DependencyTrack_Presentation.pptx
+++ b/output/SBOM_DependencyTrack_Presentation.pptx
@@ -4227,9 +4227,52 @@
           </a:p>
         </p:txBody>
       </p:sp>
+      <p:sp>
+        <p:nvSpPr>
+          <p:cNvPr id="11" name="Rectangle 10"/>
+          <p:cNvSpPr/>
+          <p:nvPr/>
+        </p:nvSpPr>
+        <p:spPr>
+          <a:xfrm>
+            <a:off x="274320" y="1325880"/>
+            <a:ext cx="11612880" cy="5001768"/>
+          </a:xfrm>
+          <a:prstGeom prst="rect">
+            <a:avLst/>
+          </a:prstGeom>
+          <a:solidFill>
+            <a:srgbClr val="0A0A0A"/>
+          </a:solidFill>
+          <a:ln>
+            <a:noFill/>
+          </a:ln>
+        </p:spPr>
+        <p:style>
+          <a:lnRef idx="1">
+            <a:schemeClr val="accent1"/>
+          </a:lnRef>
+          <a:fillRef idx="3">
+            <a:schemeClr val="accent1"/>
+          </a:fillRef>
+          <a:effectRef idx="2">
+            <a:schemeClr val="accent1"/>
+          </a:effectRef>
+          <a:fontRef idx="minor">
+            <a:schemeClr val="lt1"/>
+          </a:fontRef>
+        </p:style>
+        <p:txBody>
+          <a:bodyPr rtlCol="0" anchor="ctr"/>
+          <a:lstStyle/>
+          <a:p>
+            <a:pPr algn="ctr"/>
+          </a:p>
+        </p:txBody>
+      </p:sp>
       <p:pic>
         <p:nvPicPr>
-          <p:cNvPr id="11" name="Picture 10" descr="audit-finding-project.png"/>
+          <p:cNvPr id="12" name="Picture 11" descr="audit-finding-project.png"/>
           <p:cNvPicPr>
             <a:picLocks noChangeAspect="1"/>
           </p:cNvPicPr>
@@ -4243,8 +4286,8 @@
         </p:blipFill>
         <p:spPr>
           <a:xfrm>
-            <a:off x="274320" y="1325880"/>
-            <a:ext cx="11612880" cy="5001768"/>
+            <a:off x="2275611" y="1325880"/>
+            <a:ext cx="7610297" cy="5001768"/>
           </a:xfrm>
           <a:prstGeom prst="rect">
             <a:avLst/>
@@ -4253,7 +4296,7 @@
       </p:pic>
       <p:sp>
         <p:nvSpPr>
-          <p:cNvPr id="12" name="Rectangle 11"/>
+          <p:cNvPr id="13" name="Rectangle 12"/>
           <p:cNvSpPr/>
           <p:nvPr/>
         </p:nvSpPr>
@@ -4296,7 +4339,7 @@
       </p:sp>
       <p:sp>
         <p:nvSpPr>
-          <p:cNvPr id="13" name="TextBox 12"/>
+          <p:cNvPr id="14" name="TextBox 13"/>
           <p:cNvSpPr txBox="1"/>
           <p:nvPr/>
         </p:nvSpPr>
@@ -30649,9 +30692,52 @@
           </a:p>
         </p:txBody>
       </p:sp>
+      <p:sp>
+        <p:nvSpPr>
+          <p:cNvPr id="11" name="Rectangle 10"/>
+          <p:cNvSpPr/>
+          <p:nvPr/>
+        </p:nvSpPr>
+        <p:spPr>
+          <a:xfrm>
+            <a:off x="274320" y="1325880"/>
+            <a:ext cx="11612880" cy="2212848"/>
+          </a:xfrm>
+          <a:prstGeom prst="rect">
+            <a:avLst/>
+          </a:prstGeom>
+          <a:solidFill>
+            <a:srgbClr val="0A0A0A"/>
+          </a:solidFill>
+          <a:ln>
+            <a:noFill/>
+          </a:ln>
+        </p:spPr>
+        <p:style>
+          <a:lnRef idx="1">
+            <a:schemeClr val="accent1"/>
+          </a:lnRef>
+          <a:fillRef idx="3">
+            <a:schemeClr val="accent1"/>
+          </a:fillRef>
+          <a:effectRef idx="2">
+            <a:schemeClr val="accent1"/>
+          </a:effectRef>
+          <a:fontRef idx="minor">
+            <a:schemeClr val="lt1"/>
+          </a:fontRef>
+        </p:style>
+        <p:txBody>
+          <a:bodyPr rtlCol="0" anchor="ctr"/>
+          <a:lstStyle/>
+          <a:p>
+            <a:pPr algn="ctr"/>
+          </a:p>
+        </p:txBody>
+      </p:sp>
       <p:pic>
         <p:nvPicPr>
-          <p:cNvPr id="11" name="Picture 10" descr="dashboard.png"/>
+          <p:cNvPr id="12" name="Picture 11" descr="dashboard.png"/>
           <p:cNvPicPr>
             <a:picLocks noChangeAspect="1"/>
           </p:cNvPicPr>
@@ -30665,8 +30751,8 @@
         </p:blipFill>
         <p:spPr>
           <a:xfrm>
-            <a:off x="274320" y="1325880"/>
-            <a:ext cx="11612880" cy="2212848"/>
+            <a:off x="4775245" y="1325880"/>
+            <a:ext cx="2611030" cy="2212848"/>
           </a:xfrm>
           <a:prstGeom prst="rect">
             <a:avLst/>
@@ -30675,7 +30761,7 @@
       </p:pic>
       <p:sp>
         <p:nvSpPr>
-          <p:cNvPr id="12" name="Rectangle 11"/>
+          <p:cNvPr id="13" name="Rectangle 12"/>
           <p:cNvSpPr/>
           <p:nvPr/>
         </p:nvSpPr>
@@ -30718,7 +30804,7 @@
       </p:sp>
       <p:sp>
         <p:nvSpPr>
-          <p:cNvPr id="13" name="TextBox 12"/>
+          <p:cNvPr id="14" name="TextBox 13"/>
           <p:cNvSpPr txBox="1"/>
           <p:nvPr/>
         </p:nvSpPr>
@@ -30750,9 +30836,52 @@
           </a:p>
         </p:txBody>
       </p:sp>
+      <p:sp>
+        <p:nvSpPr>
+          <p:cNvPr id="15" name="Rectangle 14"/>
+          <p:cNvSpPr/>
+          <p:nvPr/>
+        </p:nvSpPr>
+        <p:spPr>
+          <a:xfrm>
+            <a:off x="274320" y="3977639"/>
+            <a:ext cx="5760720" cy="2304288"/>
+          </a:xfrm>
+          <a:prstGeom prst="rect">
+            <a:avLst/>
+          </a:prstGeom>
+          <a:solidFill>
+            <a:srgbClr val="0A0A0A"/>
+          </a:solidFill>
+          <a:ln>
+            <a:noFill/>
+          </a:ln>
+        </p:spPr>
+        <p:style>
+          <a:lnRef idx="1">
+            <a:schemeClr val="accent1"/>
+          </a:lnRef>
+          <a:fillRef idx="3">
+            <a:schemeClr val="accent1"/>
+          </a:fillRef>
+          <a:effectRef idx="2">
+            <a:schemeClr val="accent1"/>
+          </a:effectRef>
+          <a:fontRef idx="minor">
+            <a:schemeClr val="lt1"/>
+          </a:fontRef>
+        </p:style>
+        <p:txBody>
+          <a:bodyPr rtlCol="0" anchor="ctr"/>
+          <a:lstStyle/>
+          <a:p>
+            <a:pPr algn="ctr"/>
+          </a:p>
+        </p:txBody>
+      </p:sp>
       <p:pic>
         <p:nvPicPr>
-          <p:cNvPr id="14" name="Picture 13" descr="collection-projects-details.png"/>
+          <p:cNvPr id="16" name="Picture 15" descr="collection-projects-details.png"/>
           <p:cNvPicPr>
             <a:picLocks noChangeAspect="1"/>
           </p:cNvPicPr>
@@ -30766,8 +30895,8 @@
         </p:blipFill>
         <p:spPr>
           <a:xfrm>
-            <a:off x="274320" y="3977639"/>
-            <a:ext cx="5760720" cy="2304288"/>
+            <a:off x="410394" y="3977639"/>
+            <a:ext cx="5488572" cy="2304288"/>
           </a:xfrm>
           <a:prstGeom prst="rect">
             <a:avLst/>
@@ -30776,7 +30905,7 @@
       </p:pic>
       <p:sp>
         <p:nvSpPr>
-          <p:cNvPr id="15" name="Rectangle 14"/>
+          <p:cNvPr id="17" name="Rectangle 16"/>
           <p:cNvSpPr/>
           <p:nvPr/>
         </p:nvSpPr>
@@ -30819,7 +30948,7 @@
       </p:sp>
       <p:sp>
         <p:nvSpPr>
-          <p:cNvPr id="16" name="TextBox 15"/>
+          <p:cNvPr id="18" name="TextBox 17"/>
           <p:cNvSpPr txBox="1"/>
           <p:nvPr/>
         </p:nvSpPr>
@@ -30851,9 +30980,52 @@
           </a:p>
         </p:txBody>
       </p:sp>
+      <p:sp>
+        <p:nvSpPr>
+          <p:cNvPr id="19" name="Rectangle 18"/>
+          <p:cNvSpPr/>
+          <p:nvPr/>
+        </p:nvSpPr>
+        <p:spPr>
+          <a:xfrm>
+            <a:off x="6153912" y="3977639"/>
+            <a:ext cx="5733288" cy="2304288"/>
+          </a:xfrm>
+          <a:prstGeom prst="rect">
+            <a:avLst/>
+          </a:prstGeom>
+          <a:solidFill>
+            <a:srgbClr val="0A0A0A"/>
+          </a:solidFill>
+          <a:ln>
+            <a:noFill/>
+          </a:ln>
+        </p:spPr>
+        <p:style>
+          <a:lnRef idx="1">
+            <a:schemeClr val="accent1"/>
+          </a:lnRef>
+          <a:fillRef idx="3">
+            <a:schemeClr val="accent1"/>
+          </a:fillRef>
+          <a:effectRef idx="2">
+            <a:schemeClr val="accent1"/>
+          </a:effectRef>
+          <a:fontRef idx="minor">
+            <a:schemeClr val="lt1"/>
+          </a:fontRef>
+        </p:style>
+        <p:txBody>
+          <a:bodyPr rtlCol="0" anchor="ctr"/>
+          <a:lstStyle/>
+          <a:p>
+            <a:pPr algn="ctr"/>
+          </a:p>
+        </p:txBody>
+      </p:sp>
       <p:pic>
         <p:nvPicPr>
-          <p:cNvPr id="17" name="Picture 16" descr="vulnerabilities.png"/>
+          <p:cNvPr id="20" name="Picture 19" descr="vulnerabilities.png"/>
           <p:cNvPicPr>
             <a:picLocks noChangeAspect="1"/>
           </p:cNvPicPr>
@@ -30867,8 +31039,8 @@
         </p:blipFill>
         <p:spPr>
           <a:xfrm>
-            <a:off x="6153912" y="3977639"/>
-            <a:ext cx="5733288" cy="2304288"/>
+            <a:off x="7267544" y="3977639"/>
+            <a:ext cx="3506023" cy="2304288"/>
           </a:xfrm>
           <a:prstGeom prst="rect">
             <a:avLst/>
@@ -30877,7 +31049,7 @@
       </p:pic>
       <p:sp>
         <p:nvSpPr>
-          <p:cNvPr id="18" name="Rectangle 17"/>
+          <p:cNvPr id="21" name="Rectangle 20"/>
           <p:cNvSpPr/>
           <p:nvPr/>
         </p:nvSpPr>
@@ -30920,7 +31092,7 @@
       </p:sp>
       <p:sp>
         <p:nvSpPr>
-          <p:cNvPr id="19" name="TextBox 18"/>
+          <p:cNvPr id="22" name="TextBox 21"/>
           <p:cNvSpPr txBox="1"/>
           <p:nvPr/>
         </p:nvSpPr>
